--- a/hackathon-onchain-finance/demo-assets/avavault-perp-pitch-zh.pptx
+++ b/hackathon-onchain-finance/demo-assets/avavault-perp-pitch-zh.pptx
@@ -3528,7 +3528,7 @@
               </a:defRPr>
             </a:pPr>
             <a:r>
-              <a:t>•  GitHub: &lt;填入你 fork 后的仓库链接&gt;</a:t>
+              <a:t>•  GitHub: https://github.com/CodingGeoff/avavault-perp</a:t>
             </a:r>
           </a:p>
           <a:p>
@@ -4359,7 +4359,7 @@
               </a:defRPr>
             </a:pPr>
             <a:r>
-              <a:t>•  预言机层 · DEX Oracle — LFJ V1 实时报价，getAmountsOut 链上定价</a:t>
+              <a:t>•  预言机层 · DEX Oracle — LFJ V1 交易池 + TWAP 时间加权报价，抗瞬时价格操纵</a:t>
             </a:r>
           </a:p>
           <a:p>
@@ -4389,7 +4389,7 @@
               </a:defRPr>
             </a:pPr>
             <a:r>
-              <a:t>•  结算层 · Perp Vault — 链下撮合 + 链上净额结算的永续合约引擎</a:t>
+              <a:t>•  结算层 · Perp Vault — 链下撮合 + 链上签名授权结算；仓位/杠杆/强平/保险基金/资金费率</a:t>
             </a:r>
           </a:p>
         </p:txBody>
@@ -4598,7 +4598,7 @@
                 </a:solidFill>
                 <a:latin typeface="Arial"/>
               </a:rPr>
-              <a:t>MultiCollateralVault 已真实部署到 Fuji 测试网</a:t>
+              <a:t>MultiCollateralVaultV2 已真实部署到 Fuji 测试网</a:t>
             </a:r>
           </a:p>
         </p:txBody>
@@ -4657,7 +4657,7 @@
                 </a:solidFill>
                 <a:latin typeface="Arial"/>
               </a:rPr>
-              <a:t>Snowtrace 可直接验证：合约创建交易 + 3 笔真实链上交互</a:t>
+              <a:t>Snowtrace 可直接验证：合约创建交易 + 3 笔真实链上交互（图为 V1 首次部署记录，V2 地址见仓库 README）</a:t>
             </a:r>
           </a:p>
         </p:txBody>
@@ -5520,7 +5520,7 @@
                 </a:solidFill>
                 <a:latin typeface="Arial"/>
               </a:rPr>
-              <a:t>真实登录签名 · 真实订单簿深度 · 真实下单回报</a:t>
+              <a:t>真实登录签名 · 真实订单簿深度 · 真实下单回报 · 杠杆仓位与强平价实时可见</a:t>
             </a:r>
           </a:p>
         </p:txBody>
